--- a/public/fun/pack/pptx/talkpro/발표템플릿프리미엄_42_교육·강의_제이드실버.pptx
+++ b/public/fun/pack/pptx/talkpro/발표템플릿프리미엄_42_교육·강의_제이드실버.pptx
@@ -115,12 +115,12 @@
   <p:extLst>
     <p:ext uri="{521415D9-36F7-43E2-AB2F-B90AF26B5E84}">
       <p14:sectionLst xmlns:p14="http://schemas.microsoft.com/office/powerpoint/2010/main">
-        <p14:section name="시작" id="{CD5DE737-A9E8-4F23-BB04-473BE464C8A8}">
+        <p14:section name="시작" id="{A8C5DB07-7748-475F-9CB0-388F54FF099C}">
           <p14:sldIdLst>
             <p14:sldId id="256"/>
           </p14:sldIdLst>
         </p14:section>
-        <p14:section name="본문" id="{152AC9AE-3F8E-4837-B784-C73B0E30AD0A}">
+        <p14:section name="본문" id="{8518AE57-D6F1-44AF-BD4C-6CA452234C9F}">
           <p14:sldIdLst>
             <p14:sldId id="257"/>
             <p14:sldId id="258"/>
@@ -131,7 +131,7 @@
             <p14:sldId id="263"/>
           </p14:sldIdLst>
         </p14:section>
-        <p14:section name="마무리" id="{5A5DC477-20DF-4C1E-9B8D-5F3117F58D6E}">
+        <p14:section name="마무리" id="{001774FF-7EB8-4154-9167-693BA96B6B29}">
           <p14:sldIdLst>
             <p14:sldId id="264"/>
           </p14:sldIdLst>
@@ -1929,7 +1929,7 @@
             </a:lvl1pPr>
           </a:lstStyle>
           <a:p>
-            <a:fld id="{379A5280-7973-483E-9F06-7562BC1C1FAD}" type="slidenum">
+            <a:fld id="{66121BE2-9295-4D4D-ADD5-4D4A3205A85D}" type="slidenum">
               <a:rPr lang="en-US"/>
               <a:t>‹#›</a:t>
             </a:fld>
@@ -2962,7 +2962,7 @@
             </a:lvl1pPr>
           </a:lstStyle>
           <a:p>
-            <a:fld id="{EF2CFEA2-7D9C-4FF0-AD0B-F08FB0B40838}" type="slidenum">
+            <a:fld id="{75642F6C-B3DD-41DB-9E1F-3929CDF47267}" type="slidenum">
               <a:rPr lang="en-US"/>
               <a:t>‹#›</a:t>
             </a:fld>
@@ -3969,7 +3969,7 @@
             </a:lvl1pPr>
           </a:lstStyle>
           <a:p>
-            <a:fld id="{D3C6A653-06EF-446F-9CBE-BA9B92E8B1C5}" type="slidenum">
+            <a:fld id="{7B511547-D658-4160-9DFA-9ED3DBFEA371}" type="slidenum">
               <a:rPr lang="en-US"/>
               <a:t>‹#›</a:t>
             </a:fld>
@@ -5138,7 +5138,7 @@
           <a:p>
             <a:r>
               <a:rPr lang="ko-KR"/>
-              <a:t>0000. 00. 00</a:t>
+              <a:t>날짜 입력</a:t>
             </a:r>
           </a:p>
         </p:txBody>
@@ -5223,7 +5223,7 @@
           <a:bodyPr/>
           <a:lstStyle/>
           <a:p>
-            <a:fld id="{DDC9C0D4-71F6-4B97-8208-F0C02DBEA39E}" type="slidenum">
+            <a:fld id="{E4DE42FB-A30B-47D7-94F1-22EE8C980FAF}" type="slidenum">
               <a:rPr lang="en-US"/>
               <a:t>‹#›</a:t>
             </a:fld>
@@ -6337,7 +6337,7 @@
           <a:bodyPr/>
           <a:lstStyle/>
           <a:p>
-            <a:fld id="{B5BFD291-DD75-425A-AF2E-547EF1421DDC}" type="slidenum">
+            <a:fld id="{18CEADAA-09EF-444C-88A6-2D6E09B6B35E}" type="slidenum">
               <a:rPr lang="en-US"/>
               <a:t>‹#›</a:t>
             </a:fld>
@@ -6425,7 +6425,7 @@
           <a:bodyPr/>
           <a:lstStyle/>
           <a:p>
-            <a:fld id="{DEB2DC67-D6C2-4342-B347-CB68870F0575}" type="slidenum">
+            <a:fld id="{65EE72B3-27BA-43DB-8F62-17B76517B61D}" type="slidenum">
               <a:rPr lang="en-US"/>
               <a:t>‹#›</a:t>
             </a:fld>
@@ -7332,7 +7332,7 @@
           <a:bodyPr/>
           <a:lstStyle/>
           <a:p>
-            <a:fld id="{D3917842-4B2A-44A9-ADCF-EA6D9D101435}" type="slidenum">
+            <a:fld id="{F6AEA414-BD0B-4804-9FF5-DD4B5AE45125}" type="slidenum">
               <a:rPr lang="en-US"/>
               <a:t>‹#›</a:t>
             </a:fld>
@@ -7936,7 +7936,7 @@
           <a:bodyPr/>
           <a:lstStyle/>
           <a:p>
-            <a:fld id="{C2B61A69-4E33-4959-8B52-A2F805E73FA7}" type="slidenum">
+            <a:fld id="{5CB4B940-90F4-4C1A-AF4A-A9B65CF07876}" type="slidenum">
               <a:rPr lang="en-US"/>
               <a:t>‹#›</a:t>
             </a:fld>
@@ -8116,7 +8116,7 @@
           <a:bodyPr/>
           <a:lstStyle/>
           <a:p>
-            <a:fld id="{B72B25AC-2CBB-43AA-9690-F8F7957D9FC8}" type="slidenum">
+            <a:fld id="{085AAB31-72E2-49B9-B0CA-6CBEE10292AE}" type="slidenum">
               <a:rPr lang="en-US"/>
               <a:t>‹#›</a:t>
             </a:fld>
@@ -9180,7 +9180,7 @@
           <a:bodyPr/>
           <a:lstStyle/>
           <a:p>
-            <a:fld id="{3BA38F52-D6E8-4B7B-BDFB-2DB23AE7C3C5}" type="slidenum">
+            <a:fld id="{136F085E-63F4-4A69-A58D-E9C98EDFEB27}" type="slidenum">
               <a:rPr lang="en-US"/>
               <a:t>‹#›</a:t>
             </a:fld>
